--- a/assets/toggl-smartscope-deck.pptx
+++ b/assets/toggl-smartscope-deck.pptx
@@ -2218,16 +2218,16 @@
         <p:spPr>
           <a:xfrm>
             <a:off x="914400" y="3200400"/>
-            <a:ext cx="2743200" cy="0"/>
-          </a:xfrm>
-          <a:prstGeom prst="rect">
-            <a:avLst/>
-          </a:prstGeom>
-          <a:noFill/>
-          <a:ln/>
-        </p:spPr>
-        <p:txBody>
-          <a:bodyPr wrap="square" rtlCol="0" anchor="ctr"/>
+            <a:ext cx="2743200" cy="2286000"/>
+          </a:xfrm>
+          <a:prstGeom prst="rect">
+            <a:avLst/>
+          </a:prstGeom>
+          <a:noFill/>
+          <a:ln/>
+        </p:spPr>
+        <p:txBody>
+          <a:bodyPr wrap="square" rtlCol="0" anchor="t"/>
           <a:lstStyle/>
           <a:p>
             <a:pPr marL="342900" indent="-342900">
@@ -2377,16 +2377,16 @@
         <p:spPr>
           <a:xfrm>
             <a:off x="5486400" y="3200400"/>
-            <a:ext cx="2743200" cy="0"/>
-          </a:xfrm>
-          <a:prstGeom prst="rect">
-            <a:avLst/>
-          </a:prstGeom>
-          <a:noFill/>
-          <a:ln/>
-        </p:spPr>
-        <p:txBody>
-          <a:bodyPr wrap="square" rtlCol="0" anchor="ctr"/>
+            <a:ext cx="2743200" cy="2286000"/>
+          </a:xfrm>
+          <a:prstGeom prst="rect">
+            <a:avLst/>
+          </a:prstGeom>
+          <a:noFill/>
+          <a:ln/>
+        </p:spPr>
+        <p:txBody>
+          <a:bodyPr wrap="square" rtlCol="0" anchor="t"/>
           <a:lstStyle/>
           <a:p>
             <a:pPr marL="342900" indent="-342900">
@@ -4374,16 +4374,16 @@
         <p:spPr>
           <a:xfrm>
             <a:off x="457200" y="1828800"/>
-            <a:ext cx="3657600" cy="0"/>
-          </a:xfrm>
-          <a:prstGeom prst="rect">
-            <a:avLst/>
-          </a:prstGeom>
-          <a:noFill/>
-          <a:ln/>
-        </p:spPr>
-        <p:txBody>
-          <a:bodyPr wrap="square" rtlCol="0" anchor="ctr"/>
+            <a:ext cx="3657600" cy="2286000"/>
+          </a:xfrm>
+          <a:prstGeom prst="rect">
+            <a:avLst/>
+          </a:prstGeom>
+          <a:noFill/>
+          <a:ln/>
+        </p:spPr>
+        <p:txBody>
+          <a:bodyPr wrap="square" rtlCol="0" anchor="t"/>
           <a:lstStyle/>
           <a:p>
             <a:pPr marL="342900" indent="-342900">
@@ -4522,16 +4522,16 @@
         <p:spPr>
           <a:xfrm>
             <a:off x="5029200" y="1828800"/>
-            <a:ext cx="3657600" cy="0"/>
-          </a:xfrm>
-          <a:prstGeom prst="rect">
-            <a:avLst/>
-          </a:prstGeom>
-          <a:noFill/>
-          <a:ln/>
-        </p:spPr>
-        <p:txBody>
-          <a:bodyPr wrap="square" rtlCol="0" anchor="ctr"/>
+            <a:ext cx="3657600" cy="2286000"/>
+          </a:xfrm>
+          <a:prstGeom prst="rect">
+            <a:avLst/>
+          </a:prstGeom>
+          <a:noFill/>
+          <a:ln/>
+        </p:spPr>
+        <p:txBody>
+          <a:bodyPr wrap="square" rtlCol="0" anchor="t"/>
           <a:lstStyle/>
           <a:p>
             <a:pPr marL="342900" indent="-342900">
